--- a/materials/Lab_Project_info.pptx
+++ b/materials/Lab_Project_info.pptx
@@ -2918,7 +2918,7 @@
               <a:buChar char="•"/>
             </a:pPr>
             <a:r>
-              <a:rPr b="0"/>
+              <a:rPr b="0" dirty="0"/>
               <a:t>Required section in Assignment 1</a:t>
             </a:r>
           </a:p>
@@ -2927,7 +2927,7 @@
               <a:buNone/>
             </a:pPr>
             <a:r>
-              <a:rPr b="0"/>
+              <a:rPr b="0" dirty="0"/>
               <a:t>Link the relevant GenAI conversation or conversations</a:t>
             </a:r>
           </a:p>
@@ -2936,6 +2936,7 @@
               <a:buNone/>
             </a:pPr>
             <a:r>
+              <a:rPr dirty="0"/>
               <a:t>Identify where GenAI resulted in cognitive offloading</a:t>
             </a:r>
           </a:p>
@@ -2944,7 +2945,7 @@
               <a:buNone/>
             </a:pPr>
             <a:r>
-              <a:rPr b="0"/>
+              <a:rPr b="0" dirty="0"/>
               <a:t>Identify where GenAI supported learning</a:t>
             </a:r>
           </a:p>
@@ -2952,7 +2953,7 @@
             <a:pPr marL="569214" lvl="1" indent="-285750">
               <a:buNone/>
             </a:pPr>
-            <a:endParaRPr b="0"/>
+            <a:endParaRPr b="0" dirty="0"/>
           </a:p>
           <a:p>
             <a:pPr marL="285750" indent="-285750">
@@ -2960,7 +2961,7 @@
               <a:buChar char="•"/>
             </a:pPr>
             <a:r>
-              <a:rPr b="0"/>
+              <a:rPr b="0" dirty="0"/>
               <a:t>Not graded or otherwise taken into consideration</a:t>
             </a:r>
           </a:p>
@@ -2969,7 +2970,7 @@
               <a:buNone/>
             </a:pPr>
             <a:r>
-              <a:rPr b="0"/>
+              <a:rPr b="0" dirty="0"/>
               <a:t>Does not count towards the 1,000-word limit</a:t>
             </a:r>
           </a:p>
@@ -2977,7 +2978,7 @@
             <a:pPr marL="569214" lvl="1" indent="-285750">
               <a:buNone/>
             </a:pPr>
-            <a:endParaRPr b="0"/>
+            <a:endParaRPr b="0" dirty="0"/>
           </a:p>
         </p:txBody>
       </p:sp>
@@ -3279,7 +3280,7 @@
         <p:spPr>
           <a:xfrm>
             <a:off x="457200" y="1145495"/>
-            <a:ext cx="11130197" cy="4801314"/>
+            <a:ext cx="11130197" cy="3970318"/>
           </a:xfrm>
           <a:prstGeom prst="rect">
             <a:avLst/>
@@ -3293,34 +3294,38 @@
           <a:lstStyle/>
           <a:p>
             <a:r>
+              <a:rPr dirty="0"/>
               <a:t>Discuss as a group how you envision working together. Discuss each person’s responsibilities and make agreements on how to collaborate</a:t>
             </a:r>
           </a:p>
           <a:p>
-            <a:endParaRPr/>
-          </a:p>
-          <a:p>
-            <a:r>
+            <a:endParaRPr dirty="0"/>
+          </a:p>
+          <a:p>
+            <a:r>
+              <a:rPr dirty="0"/>
               <a:t>You can use the template posted on the website (project guidelines), or here: </a:t>
             </a:r>
             <a:r>
-              <a:rPr>
+              <a:rPr dirty="0">
                 <a:hlinkClick r:id="rId3"/>
               </a:rPr>
               <a:t>https://docs.google.com/document/d/1VdUVTzQaxsFTXqVFKyJlNi9FZ_WlRKkHP-da_1MlPxI</a:t>
             </a:r>
-            <a:endParaRPr/>
-          </a:p>
-          <a:p>
-            <a:r>
+            <a:endParaRPr dirty="0"/>
+          </a:p>
+          <a:p>
+            <a:r>
+              <a:rPr dirty="0"/>
               <a:t>(click on File -&gt; Make a copy)</a:t>
             </a:r>
           </a:p>
           <a:p>
-            <a:endParaRPr/>
-          </a:p>
-          <a:p>
-            <a:r>
+            <a:endParaRPr dirty="0"/>
+          </a:p>
+          <a:p>
+            <a:r>
+              <a:rPr dirty="0"/>
               <a:t>Although completing and signing it is not required, we encourage you to do so. This will allow us to intervene in the rare case conflict arises.</a:t>
             </a:r>
           </a:p>
@@ -3329,17 +3334,18 @@
               <a:buFont typeface="Arial"/>
               <a:buChar char="•"/>
             </a:pPr>
-            <a:endParaRPr/>
+            <a:endParaRPr dirty="0"/>
           </a:p>
           <a:p>
             <a:pPr marL="285750" indent="-285750">
               <a:buFont typeface="Arial"/>
               <a:buChar char="•"/>
             </a:pPr>
-            <a:endParaRPr/>
-          </a:p>
-          <a:p>
-            <a:r>
+            <a:endParaRPr dirty="0"/>
+          </a:p>
+          <a:p>
+            <a:r>
+              <a:rPr dirty="0"/>
               <a:t>First step for the group project (start already this week):</a:t>
             </a:r>
           </a:p>
@@ -3349,6 +3355,7 @@
               <a:buChar char="•"/>
             </a:pPr>
             <a:r>
+              <a:rPr dirty="0"/>
               <a:t>Read project guidelines</a:t>
             </a:r>
           </a:p>
@@ -3358,23 +3365,8 @@
               <a:buChar char="•"/>
             </a:pPr>
             <a:r>
+              <a:rPr dirty="0"/>
               <a:t>Start thinking about possible research questions and datasets that could help answering it. Keep it simple!</a:t>
-            </a:r>
-          </a:p>
-          <a:p>
-            <a:pPr marL="285750" indent="-285750">
-              <a:buFont typeface="Arial"/>
-              <a:buChar char="•"/>
-            </a:pPr>
-            <a:r>
-              <a:t>The feedback moments are Fridays 11-15. Is there any time slot you cannot make within those four hours? Then email Javier and Thijs </a:t>
-            </a:r>
-            <a:r>
-              <a:rPr b="1"/>
-              <a:t>before Friday</a:t>
-            </a:r>
-            <a:r>
-              <a:t>.</a:t>
             </a:r>
           </a:p>
         </p:txBody>
@@ -3683,13 +3675,13 @@
           <a:lstStyle/>
           <a:p>
             <a:r>
-              <a:rPr b="1"/>
+              <a:rPr b="1" dirty="0"/>
               <a:t>Timeframe (see group guidelines):</a:t>
             </a:r>
           </a:p>
           <a:p>
             <a:r>
-              <a:rPr b="0"/>
+              <a:rPr b="0" dirty="0"/>
               <a:t>Before the feedback moment in week 3:</a:t>
             </a:r>
           </a:p>
@@ -3699,7 +3691,7 @@
               <a:buChar char="•"/>
             </a:pPr>
             <a:r>
-              <a:rPr b="0"/>
+              <a:rPr b="0" dirty="0"/>
               <a:t>Decide on a research question that you would like to investigate using DTD. Feel free to come up with a couple options.</a:t>
             </a:r>
           </a:p>
@@ -3709,7 +3701,7 @@
               <a:buChar char="•"/>
             </a:pPr>
             <a:r>
-              <a:rPr b="0"/>
+              <a:rPr b="0" dirty="0"/>
               <a:t>Take a quick look at the ethical review form.</a:t>
             </a:r>
           </a:p>
@@ -3719,13 +3711,13 @@
               <a:buChar char="•"/>
             </a:pPr>
             <a:r>
-              <a:rPr b="0"/>
+              <a:rPr b="0" dirty="0"/>
               <a:t>Start collecting data (you will learn how to next week)</a:t>
             </a:r>
           </a:p>
           <a:p>
             <a:r>
-              <a:rPr b="0"/>
+              <a:rPr b="0" dirty="0"/>
               <a:t>Week 3: Feedback moment (15 min/group). Come prepared!</a:t>
             </a:r>
           </a:p>
@@ -3735,23 +3727,26 @@
               <a:buChar char="•"/>
             </a:pPr>
             <a:r>
+              <a:rPr dirty="0"/>
               <a:t>Prepare a few (&lt;5) slides with your progress </a:t>
             </a:r>
             <a:r>
-              <a:rPr b="0"/>
+              <a:rPr b="0" dirty="0"/>
               <a:t>(RQ, dataset, proposed next steps) </a:t>
             </a:r>
             <a:r>
+              <a:rPr dirty="0"/>
               <a:t>which indicates on what topics each group member worked</a:t>
             </a:r>
             <a:r>
-              <a:rPr b="0"/>
-              <a:t> (each slide should contain the contributors). Send your prepared slides to your project supervisor (either Thijs or Laura) before the meeting. </a:t>
-            </a:r>
-          </a:p>
-          <a:p>
-            <a:r>
-              <a:rPr b="0"/>
+              <a:rPr b="0" dirty="0"/>
+              <a:t> (each slide should contain the contributors). </a:t>
+            </a:r>
+            <a:endParaRPr lang="en-US" b="0" dirty="0"/>
+          </a:p>
+          <a:p>
+            <a:r>
+              <a:rPr b="0" dirty="0"/>
               <a:t>Before feedback moment in week 4:</a:t>
             </a:r>
           </a:p>
@@ -3761,7 +3756,7 @@
               <a:buChar char="•"/>
             </a:pPr>
             <a:r>
-              <a:rPr b="0"/>
+              <a:rPr b="0" dirty="0"/>
               <a:t>Finish collecting data</a:t>
             </a:r>
           </a:p>
@@ -3771,24 +3766,28 @@
               <a:buChar char="•"/>
             </a:pPr>
             <a:r>
-              <a:rPr b="0"/>
+              <a:rPr b="0" dirty="0"/>
               <a:t>Discuss the errors you anticipate in the data (you will need to read </a:t>
             </a:r>
             <a:r>
-              <a:rPr sz="1700" b="0"/>
-              <a:t>BbB chapter 3.1-3.4 for that)</a:t>
-            </a:r>
-            <a:endParaRPr b="0"/>
-          </a:p>
-          <a:p>
-            <a:r>
-              <a:rPr b="0"/>
+              <a:rPr sz="1700" b="0" dirty="0" err="1"/>
+              <a:t>BbB</a:t>
+            </a:r>
+            <a:r>
+              <a:rPr sz="1700" b="0" dirty="0"/>
+              <a:t> chapter 3.1-3.4 for that)</a:t>
+            </a:r>
+            <a:endParaRPr b="0" dirty="0"/>
+          </a:p>
+          <a:p>
+            <a:r>
+              <a:rPr b="0" dirty="0"/>
               <a:t>Week 4: Feedback moment (15 min/group). Come prepared! (bring slides)</a:t>
             </a:r>
           </a:p>
           <a:p>
             <a:r>
-              <a:rPr b="0"/>
+              <a:rPr b="0" dirty="0"/>
               <a:t>Week 5: Submission of first report (&lt; 1000 words)</a:t>
             </a:r>
           </a:p>
@@ -4153,13 +4152,21 @@
           <a:lstStyle/>
           <a:p>
             <a:r>
-              <a:rPr b="1"/>
-              <a:t>Timeframe: (cont)</a:t>
-            </a:r>
-          </a:p>
-          <a:p>
-            <a:r>
-              <a:rPr b="0"/>
+              <a:rPr b="1" dirty="0"/>
+              <a:t>Timeframe: (</a:t>
+            </a:r>
+            <a:r>
+              <a:rPr b="1" dirty="0" err="1"/>
+              <a:t>cont</a:t>
+            </a:r>
+            <a:r>
+              <a:rPr b="1" dirty="0"/>
+              <a:t>)</a:t>
+            </a:r>
+          </a:p>
+          <a:p>
+            <a:r>
+              <a:rPr b="0" dirty="0"/>
               <a:t>Before feedback moment on week 6:</a:t>
             </a:r>
           </a:p>
@@ -4169,7 +4176,7 @@
               <a:buChar char="•"/>
             </a:pPr>
             <a:r>
-              <a:rPr b="0"/>
+              <a:rPr b="0" dirty="0"/>
               <a:t>Run a text classification model of your choice (you’ll learn in week 5)</a:t>
             </a:r>
           </a:p>
@@ -4179,7 +4186,7 @@
               <a:buChar char="•"/>
             </a:pPr>
             <a:r>
-              <a:rPr b="0"/>
+              <a:rPr b="0" dirty="0"/>
               <a:t>Discuss the biases you expect to arise from this.</a:t>
             </a:r>
           </a:p>
@@ -4189,22 +4196,22 @@
               <a:buChar char="•"/>
             </a:pPr>
             <a:r>
-              <a:rPr b="0"/>
+              <a:rPr b="0" dirty="0"/>
               <a:t>Reflect on the ethical and power imbalances of the data used.</a:t>
             </a:r>
           </a:p>
           <a:p>
             <a:r>
-              <a:rPr b="0"/>
+              <a:rPr b="0" dirty="0"/>
               <a:t>Week 6: feedback moment (15 min/group). Come prepared! (bring slides)</a:t>
             </a:r>
           </a:p>
           <a:p>
-            <a:endParaRPr b="0"/>
-          </a:p>
-          <a:p>
-            <a:r>
-              <a:rPr b="0"/>
+            <a:endParaRPr b="0" dirty="0"/>
+          </a:p>
+          <a:p>
+            <a:r>
+              <a:rPr b="0" dirty="0"/>
               <a:t>Before feedback moment on week 7:</a:t>
             </a:r>
           </a:p>
@@ -4213,6 +4220,7 @@
               <a:buNone/>
             </a:pPr>
             <a:r>
+              <a:rPr dirty="0"/>
               <a:t>Fill the ethical questionnaire (PRIDE). </a:t>
             </a:r>
           </a:p>
@@ -4221,6 +4229,7 @@
               <a:buNone/>
             </a:pPr>
             <a:r>
+              <a:rPr dirty="0"/>
               <a:t>Elaborate how you would expand the study to tackle the issues you encounter</a:t>
             </a:r>
           </a:p>
@@ -4229,6 +4238,7 @@
               <a:buNone/>
             </a:pPr>
             <a:r>
+              <a:rPr dirty="0"/>
               <a:t>Draft a presentation</a:t>
             </a:r>
           </a:p>
@@ -4237,7 +4247,7 @@
               <a:buNone/>
             </a:pPr>
             <a:r>
-              <a:rPr b="0"/>
+              <a:rPr b="0" dirty="0"/>
               <a:t>Week 7: Feedback moment (15 min/group). Come prepared! (bring slides)</a:t>
             </a:r>
           </a:p>
@@ -4245,14 +4255,14 @@
             <a:pPr marL="285750" indent="-285750">
               <a:buNone/>
             </a:pPr>
-            <a:endParaRPr b="0"/>
+            <a:endParaRPr b="0" dirty="0"/>
           </a:p>
           <a:p>
             <a:pPr marL="285750" indent="-285750">
               <a:buNone/>
             </a:pPr>
             <a:r>
-              <a:rPr b="0"/>
+              <a:rPr b="0" dirty="0"/>
               <a:t>Week 8: Group presentation</a:t>
             </a:r>
           </a:p>
@@ -4261,8 +4271,16 @@
               <a:buNone/>
             </a:pPr>
             <a:r>
-              <a:rPr b="0"/>
-              <a:t>Week 9:: Exam</a:t>
+              <a:rPr b="0" dirty="0"/>
+              <a:t>Week 9:: </a:t>
+            </a:r>
+            <a:r>
+              <a:rPr lang="en-US" b="0" dirty="0"/>
+              <a:t>Q&amp;A and </a:t>
+            </a:r>
+            <a:r>
+              <a:rPr b="0" dirty="0"/>
+              <a:t>Exam</a:t>
             </a:r>
           </a:p>
         </p:txBody>
@@ -4551,7 +4569,7 @@
               <a:buChar char="•"/>
             </a:pPr>
             <a:r>
-              <a:rPr b="0"/>
+              <a:rPr b="0" dirty="0"/>
               <a:t>Four feedback sessions: 20 points each (weeks 3, 4, 6 and 7)</a:t>
             </a:r>
           </a:p>
@@ -4560,7 +4578,7 @@
               <a:buNone/>
             </a:pPr>
             <a:r>
-              <a:rPr b="0"/>
+              <a:rPr b="0" dirty="0"/>
               <a:t>20 points for attendance and participation at the expected level</a:t>
             </a:r>
           </a:p>
@@ -4569,6 +4587,7 @@
               <a:buNone/>
             </a:pPr>
             <a:r>
+              <a:rPr dirty="0"/>
               <a:t>0 points if absent, not participating, or participating very little</a:t>
             </a:r>
           </a:p>
@@ -4577,7 +4596,7 @@
               <a:buNone/>
             </a:pPr>
             <a:r>
-              <a:rPr b="0"/>
+              <a:rPr b="0" dirty="0"/>
               <a:t>No intermediate scores. Four sessions = 80 points = 8.0</a:t>
             </a:r>
           </a:p>
@@ -4585,7 +4604,7 @@
             <a:pPr marL="569214" lvl="1" indent="-285750">
               <a:buNone/>
             </a:pPr>
-            <a:endParaRPr b="0"/>
+            <a:endParaRPr b="0" dirty="0"/>
           </a:p>
           <a:p>
             <a:pPr marL="285750" indent="-285750">
@@ -4593,7 +4612,7 @@
               <a:buChar char="•"/>
             </a:pPr>
             <a:r>
-              <a:rPr b="0"/>
+              <a:rPr b="0" dirty="0"/>
               <a:t>20 extra points (all or nothing) for consistently doing more than expected; 100 points = 10.0</a:t>
             </a:r>
           </a:p>
@@ -4602,18 +4621,9 @@
               <a:buNone/>
             </a:pPr>
             <a:r>
-              <a:rPr b="0"/>
+              <a:rPr b="0" dirty="0"/>
               <a:t>Evidence: answers to practical instructors and task distribution and contributors in the progress slides</a:t>
             </a:r>
-          </a:p>
-          <a:p>
-            <a:pPr marL="569214" lvl="1" indent="-285750">
-              <a:buNone/>
-            </a:pPr>
-            <a:r>
-              <a:t>The extra points may exceptionally be awarded despite one zero when the overall contribution remains consistently exceptional. Report disagreements as soon as they arise, no later than the next feedback session and before submission</a:t>
-            </a:r>
-            <a:endParaRPr b="0"/>
           </a:p>
         </p:txBody>
       </p:sp>
